--- a/Презентация_Сурков_Иван_ТРПО24-3.pptx
+++ b/Презентация_Сурков_Иван_ТРПО24-3.pptx
@@ -7086,6 +7086,14 @@
           <a:lstStyle/>
           <a:p>
             <a:pPr algn="ctr"/>
+            <a:r>
+              <a:rPr sz="1800">
+                <a:solidFill>
+                  <a:srgbClr val="1F2A44"/>
+                </a:solidFill>
+              </a:rPr>
+              <a:t>Исходный код: github.com/Ivanpython2006/lombard-project</a:t>
+            </a:r>
             <a:endParaRPr lang="ru-RU" sz="1100" b="0" dirty="0">
               <a:solidFill>
                 <a:srgbClr val="697078"/>
